--- a/data-eng/decks/w2d3s0.pptx
+++ b/data-eng/decks/w2d3s0.pptx
@@ -3098,7 +3098,7 @@
       <p:grpSpPr/>
       <p:sp>
         <p:nvSpPr>
-          <p:cNvPr id="2" name="Oval 1"/>
+          <p:cNvPr id="2" name="deckgen:decor"/>
           <p:cNvSpPr/>
           <p:nvPr/>
         </p:nvSpPr>
@@ -3128,7 +3128,7 @@
       </p:sp>
       <p:sp>
         <p:nvSpPr>
-          <p:cNvPr id="3" name="Oval 2"/>
+          <p:cNvPr id="3" name="deckgen:decor"/>
           <p:cNvSpPr/>
           <p:nvPr/>
         </p:nvSpPr>
@@ -3158,7 +3158,7 @@
       </p:sp>
       <p:sp>
         <p:nvSpPr>
-          <p:cNvPr id="4" name="Oval 3"/>
+          <p:cNvPr id="4" name="deckgen:decor"/>
           <p:cNvSpPr/>
           <p:nvPr/>
         </p:nvSpPr>
@@ -3188,7 +3188,7 @@
       </p:sp>
       <p:sp>
         <p:nvSpPr>
-          <p:cNvPr id="5" name="Rectangle 4"/>
+          <p:cNvPr id="5" name="deckgen:decor"/>
           <p:cNvSpPr/>
           <p:nvPr/>
         </p:nvSpPr>
@@ -3218,7 +3218,7 @@
       </p:sp>
       <p:sp>
         <p:nvSpPr>
-          <p:cNvPr id="6" name="Oval 5"/>
+          <p:cNvPr id="6" name="deckgen:decor"/>
           <p:cNvSpPr/>
           <p:nvPr/>
         </p:nvSpPr>
@@ -3248,7 +3248,7 @@
       </p:sp>
       <p:sp>
         <p:nvSpPr>
-          <p:cNvPr id="7" name="Oval 6"/>
+          <p:cNvPr id="7" name="deckgen:decor"/>
           <p:cNvSpPr/>
           <p:nvPr/>
         </p:nvSpPr>
@@ -3278,7 +3278,7 @@
       </p:sp>
       <p:sp>
         <p:nvSpPr>
-          <p:cNvPr id="8" name="Oval 7"/>
+          <p:cNvPr id="8" name="deckgen:decor"/>
           <p:cNvSpPr/>
           <p:nvPr/>
         </p:nvSpPr>
@@ -3308,7 +3308,7 @@
       </p:sp>
       <p:sp>
         <p:nvSpPr>
-          <p:cNvPr id="9" name="Oval 8"/>
+          <p:cNvPr id="9" name="deckgen:decor"/>
           <p:cNvSpPr/>
           <p:nvPr/>
         </p:nvSpPr>
@@ -3338,7 +3338,7 @@
       </p:sp>
       <p:sp>
         <p:nvSpPr>
-          <p:cNvPr id="10" name="Rectangle 9"/>
+          <p:cNvPr id="10" name="deckgen:decor"/>
           <p:cNvSpPr/>
           <p:nvPr/>
         </p:nvSpPr>
@@ -3598,7 +3598,7 @@
       <p:grpSpPr/>
       <p:sp>
         <p:nvSpPr>
-          <p:cNvPr id="2" name="Oval 1"/>
+          <p:cNvPr id="2" name="deckgen:decor"/>
           <p:cNvSpPr/>
           <p:nvPr/>
         </p:nvSpPr>
@@ -3628,7 +3628,7 @@
       </p:sp>
       <p:sp>
         <p:nvSpPr>
-          <p:cNvPr id="3" name="Oval 2"/>
+          <p:cNvPr id="3" name="deckgen:decor"/>
           <p:cNvSpPr/>
           <p:nvPr/>
         </p:nvSpPr>
@@ -3658,7 +3658,7 @@
       </p:sp>
       <p:sp>
         <p:nvSpPr>
-          <p:cNvPr id="4" name="Oval 3"/>
+          <p:cNvPr id="4" name="deckgen:decor"/>
           <p:cNvSpPr/>
           <p:nvPr/>
         </p:nvSpPr>
@@ -4589,7 +4589,7 @@
       <p:grpSpPr/>
       <p:sp>
         <p:nvSpPr>
-          <p:cNvPr id="2" name="Oval 1"/>
+          <p:cNvPr id="2" name="deckgen:decor"/>
           <p:cNvSpPr/>
           <p:nvPr/>
         </p:nvSpPr>
@@ -4619,7 +4619,7 @@
       </p:sp>
       <p:sp>
         <p:nvSpPr>
-          <p:cNvPr id="3" name="Oval 2"/>
+          <p:cNvPr id="3" name="deckgen:decor"/>
           <p:cNvSpPr/>
           <p:nvPr/>
         </p:nvSpPr>
@@ -4649,7 +4649,7 @@
       </p:sp>
       <p:sp>
         <p:nvSpPr>
-          <p:cNvPr id="4" name="Oval 3"/>
+          <p:cNvPr id="4" name="deckgen:decor"/>
           <p:cNvSpPr/>
           <p:nvPr/>
         </p:nvSpPr>
@@ -4930,7 +4930,7 @@
                 <a:ea typeface="Pretendard"/>
                 <a:cs typeface="Pretendard"/>
               </a:rPr>
-              <a:t>1 Docker 켜짐</a:t>
+              <a:t>1. Docker 켜짐</a:t>
             </a:r>
           </a:p>
         </p:txBody>
@@ -5076,7 +5076,7 @@
                 <a:ea typeface="Pretendard"/>
                 <a:cs typeface="Pretendard"/>
               </a:rPr>
-              <a:t>2 27017 비우기</a:t>
+              <a:t>2. 27017 비우기</a:t>
             </a:r>
           </a:p>
         </p:txBody>
@@ -5222,7 +5222,7 @@
                 <a:ea typeface="Pretendard"/>
                 <a:cs typeface="Pretendard"/>
               </a:rPr>
-              <a:t>3 이미지 받기</a:t>
+              <a:t>3. 이미지 받기</a:t>
             </a:r>
           </a:p>
         </p:txBody>
@@ -5368,7 +5368,7 @@
                 <a:ea typeface="Pretendard"/>
                 <a:cs typeface="Pretendard"/>
               </a:rPr>
-              <a:t>4 가상환경</a:t>
+              <a:t>4. 가상환경</a:t>
             </a:r>
           </a:p>
         </p:txBody>
@@ -5514,7 +5514,7 @@
                 <a:ea typeface="Pretendard"/>
                 <a:cs typeface="Pretendard"/>
               </a:rPr>
-              <a:t>5 재설정</a:t>
+              <a:t>5. 재설정</a:t>
             </a:r>
           </a:p>
         </p:txBody>
@@ -5692,7 +5692,7 @@
       <p:grpSpPr/>
       <p:sp>
         <p:nvSpPr>
-          <p:cNvPr id="2" name="Oval 1"/>
+          <p:cNvPr id="2" name="deckgen:decor"/>
           <p:cNvSpPr/>
           <p:nvPr/>
         </p:nvSpPr>
@@ -5722,7 +5722,7 @@
       </p:sp>
       <p:sp>
         <p:nvSpPr>
-          <p:cNvPr id="3" name="Oval 2"/>
+          <p:cNvPr id="3" name="deckgen:decor"/>
           <p:cNvSpPr/>
           <p:nvPr/>
         </p:nvSpPr>
@@ -5752,7 +5752,7 @@
       </p:sp>
       <p:sp>
         <p:nvSpPr>
-          <p:cNvPr id="4" name="Oval 3"/>
+          <p:cNvPr id="4" name="deckgen:decor"/>
           <p:cNvSpPr/>
           <p:nvPr/>
         </p:nvSpPr>
@@ -7357,7 +7357,7 @@
       <p:grpSpPr/>
       <p:sp>
         <p:nvSpPr>
-          <p:cNvPr id="2" name="Oval 1"/>
+          <p:cNvPr id="2" name="deckgen:decor"/>
           <p:cNvSpPr/>
           <p:nvPr/>
         </p:nvSpPr>
@@ -7387,7 +7387,7 @@
       </p:sp>
       <p:sp>
         <p:nvSpPr>
-          <p:cNvPr id="3" name="Oval 2"/>
+          <p:cNvPr id="3" name="deckgen:decor"/>
           <p:cNvSpPr/>
           <p:nvPr/>
         </p:nvSpPr>
@@ -7417,7 +7417,7 @@
       </p:sp>
       <p:sp>
         <p:nvSpPr>
-          <p:cNvPr id="4" name="Oval 3"/>
+          <p:cNvPr id="4" name="deckgen:decor"/>
           <p:cNvSpPr/>
           <p:nvPr/>
         </p:nvSpPr>
@@ -8384,7 +8384,7 @@
       <p:grpSpPr/>
       <p:sp>
         <p:nvSpPr>
-          <p:cNvPr id="2" name="Oval 1"/>
+          <p:cNvPr id="2" name="deckgen:decor"/>
           <p:cNvSpPr/>
           <p:nvPr/>
         </p:nvSpPr>
@@ -8414,7 +8414,7 @@
       </p:sp>
       <p:sp>
         <p:nvSpPr>
-          <p:cNvPr id="3" name="Oval 2"/>
+          <p:cNvPr id="3" name="deckgen:decor"/>
           <p:cNvSpPr/>
           <p:nvPr/>
         </p:nvSpPr>
@@ -8444,7 +8444,7 @@
       </p:sp>
       <p:sp>
         <p:nvSpPr>
-          <p:cNvPr id="4" name="Oval 3"/>
+          <p:cNvPr id="4" name="deckgen:decor"/>
           <p:cNvSpPr/>
           <p:nvPr/>
         </p:nvSpPr>
@@ -9411,7 +9411,7 @@
       <p:grpSpPr/>
       <p:sp>
         <p:nvSpPr>
-          <p:cNvPr id="2" name="Oval 1"/>
+          <p:cNvPr id="2" name="deckgen:decor"/>
           <p:cNvSpPr/>
           <p:nvPr/>
         </p:nvSpPr>
@@ -9441,7 +9441,7 @@
       </p:sp>
       <p:sp>
         <p:nvSpPr>
-          <p:cNvPr id="3" name="Oval 2"/>
+          <p:cNvPr id="3" name="deckgen:decor"/>
           <p:cNvSpPr/>
           <p:nvPr/>
         </p:nvSpPr>
@@ -9471,7 +9471,7 @@
       </p:sp>
       <p:sp>
         <p:nvSpPr>
-          <p:cNvPr id="4" name="Oval 3"/>
+          <p:cNvPr id="4" name="deckgen:decor"/>
           <p:cNvSpPr/>
           <p:nvPr/>
         </p:nvSpPr>
@@ -11005,7 +11005,7 @@
       <p:grpSpPr/>
       <p:sp>
         <p:nvSpPr>
-          <p:cNvPr id="2" name="Oval 1"/>
+          <p:cNvPr id="2" name="deckgen:decor"/>
           <p:cNvSpPr/>
           <p:nvPr/>
         </p:nvSpPr>
@@ -11035,7 +11035,7 @@
       </p:sp>
       <p:sp>
         <p:nvSpPr>
-          <p:cNvPr id="3" name="Oval 2"/>
+          <p:cNvPr id="3" name="deckgen:decor"/>
           <p:cNvSpPr/>
           <p:nvPr/>
         </p:nvSpPr>
@@ -11065,7 +11065,7 @@
       </p:sp>
       <p:sp>
         <p:nvSpPr>
-          <p:cNvPr id="4" name="Oval 3"/>
+          <p:cNvPr id="4" name="deckgen:decor"/>
           <p:cNvSpPr/>
           <p:nvPr/>
         </p:nvSpPr>
@@ -11921,7 +11921,7 @@
       <p:grpSpPr/>
       <p:sp>
         <p:nvSpPr>
-          <p:cNvPr id="2" name="Oval 1"/>
+          <p:cNvPr id="2" name="deckgen:decor"/>
           <p:cNvSpPr/>
           <p:nvPr/>
         </p:nvSpPr>
@@ -11951,7 +11951,7 @@
       </p:sp>
       <p:sp>
         <p:nvSpPr>
-          <p:cNvPr id="3" name="Oval 2"/>
+          <p:cNvPr id="3" name="deckgen:decor"/>
           <p:cNvSpPr/>
           <p:nvPr/>
         </p:nvSpPr>
